--- a/assets/ppts/M4.5_Analog_Transmission_Multiplexing.pptx
+++ b/assets/ppts/M4.5_Analog_Transmission_Multiplexing.pptx
@@ -8,6 +8,7 @@
     <p:sldId id="256" r:id="rId7"/>
     <p:sldId id="257" r:id="rId8"/>
     <p:sldId id="258" r:id="rId9"/>
+    <p:sldId id="259" r:id="rId10"/>
   </p:sldIdLst>
   <p:sldSz cx="12191695" cy="6858000" type="screen4x3"/>
   <p:notesSz cx="6858000" cy="9144000"/>
@@ -3141,8 +3142,8 @@
         </p:nvSpPr>
         <p:spPr>
           <a:xfrm>
-            <a:off x="822960" y="1188720"/>
-            <a:ext cx="164592" cy="4480560"/>
+            <a:off x="0" y="0"/>
+            <a:ext cx="12191695" cy="137160"/>
           </a:xfrm>
           <a:prstGeom prst="rect">
             <a:avLst/>
@@ -3178,14 +3179,57 @@
       </p:sp>
       <p:sp>
         <p:nvSpPr>
-          <p:cNvPr id="4" name="TextBox 3"/>
+          <p:cNvPr id="4" name="Rectangle 3"/>
+          <p:cNvSpPr/>
+          <p:nvPr/>
+        </p:nvSpPr>
+        <p:spPr>
+          <a:xfrm>
+            <a:off x="822960" y="1097280"/>
+            <a:ext cx="164592" cy="4663440"/>
+          </a:xfrm>
+          <a:prstGeom prst="rect">
+            <a:avLst/>
+          </a:prstGeom>
+          <a:solidFill>
+            <a:srgbClr val="D97706"/>
+          </a:solidFill>
+          <a:ln>
+            <a:noFill/>
+          </a:ln>
+        </p:spPr>
+        <p:style>
+          <a:lnRef idx="1">
+            <a:schemeClr val="accent1"/>
+          </a:lnRef>
+          <a:fillRef idx="3">
+            <a:schemeClr val="accent1"/>
+          </a:fillRef>
+          <a:effectRef idx="2">
+            <a:schemeClr val="accent1"/>
+          </a:effectRef>
+          <a:fontRef idx="minor">
+            <a:schemeClr val="lt1"/>
+          </a:fontRef>
+        </p:style>
+        <p:txBody>
+          <a:bodyPr rtlCol="0" anchor="ctr"/>
+          <a:lstStyle/>
+          <a:p>
+            <a:pPr algn="ctr"/>
+          </a:p>
+        </p:txBody>
+      </p:sp>
+      <p:sp>
+        <p:nvSpPr>
+          <p:cNvPr id="5" name="TextBox 4"/>
           <p:cNvSpPr txBox="1"/>
           <p:nvPr/>
         </p:nvSpPr>
         <p:spPr>
           <a:xfrm>
-            <a:off x="1280160" y="1097280"/>
-            <a:ext cx="10058400" cy="4663440"/>
+            <a:off x="1234440" y="1005840"/>
+            <a:ext cx="10241280" cy="4846320"/>
           </a:xfrm>
           <a:prstGeom prst="rect">
             <a:avLst/>
@@ -3200,70 +3244,165 @@
           <a:p>
             <a:pPr>
               <a:spcAft>
+                <a:spcPts val="1000"/>
+              </a:spcAft>
+              <a:defRPr b="1" sz="1300">
+                <a:solidFill>
+                  <a:srgbClr val="D97706"/>
+                </a:solidFill>
+              </a:defRPr>
+            </a:pPr>
+            <a:r>
+              <a:t>PCCST501 Computer Networks | KTU 2024 Scheme • MODULE 4 • M4.5</a:t>
+            </a:r>
+          </a:p>
+          <a:p>
+            <a:pPr>
+              <a:spcAft>
                 <a:spcPts val="1200"/>
               </a:spcAft>
-              <a:defRPr b="1" sz="1300">
-                <a:solidFill>
-                  <a:srgbClr val="D97706"/>
+              <a:defRPr b="1" sz="3000">
+                <a:solidFill>
+                  <a:srgbClr val="F8FAFC"/>
                 </a:solidFill>
               </a:defRPr>
             </a:pPr>
             <a:r>
-              <a:t>PCCST501 Computer Networks | KTU 2024 Scheme • MODULE 4 • M4.5</a:t>
+              <a:t>Analog Transmission &amp; Bandwidth Utilization (Multiplexing)</a:t>
             </a:r>
           </a:p>
           <a:p>
             <a:pPr>
               <a:spcAft>
-                <a:spcPts val="1400"/>
+                <a:spcPts val="2400"/>
               </a:spcAft>
-              <a:defRPr b="1" sz="3200">
-                <a:solidFill>
-                  <a:srgbClr val="F8FAFC"/>
+              <a:defRPr sz="1600">
+                <a:solidFill>
+                  <a:srgbClr val="94A3B8"/>
                 </a:solidFill>
               </a:defRPr>
             </a:pPr>
             <a:r>
-              <a:t>Analog Transmission &amp; Bandwidth Utilization</a:t>
+              <a:t>Digital-to-Analog Modulation (ASK, FSK, PSK, QAM), Multiplexing Techniques (FDM, WDM, Synchronous vs Statistical TDM), Spread Spectrum (FHSS, DSSS)</a:t>
             </a:r>
           </a:p>
           <a:p>
             <a:pPr>
               <a:spcAft>
-                <a:spcPts val="2800"/>
+                <a:spcPts val="300"/>
               </a:spcAft>
-              <a:defRPr sz="1700">
+              <a:defRPr b="1" sz="1350">
+                <a:solidFill>
+                  <a:srgbClr val="E2E8F0"/>
+                </a:solidFill>
+              </a:defRPr>
+            </a:pPr>
+            <a:r>
+              <a:t>Prepared by: Prof. Anju Markose | Assistant Professor, Dept. of CSE | VJCET</a:t>
+            </a:r>
+          </a:p>
+          <a:p>
+            <a:pPr>
+              <a:defRPr sz="1150">
                 <a:solidFill>
                   <a:srgbClr val="94A3B8"/>
                 </a:solidFill>
               </a:defRPr>
             </a:pPr>
             <a:r>
-              <a:t>Digital-to-Analog Modulation (ASK, FSK, PSK, QAM), Multiplexing Techniques: FDM, WDM, Synchronous TDM &amp; Statistical TDM</a:t>
-            </a:r>
-          </a:p>
+              <a:t>Viswajyothi College of Engineering and Technology (VJCET), Vazhakulam • KTU S5 CSE</a:t>
+            </a:r>
+          </a:p>
+        </p:txBody>
+      </p:sp>
+      <p:sp>
+        <p:nvSpPr>
+          <p:cNvPr id="6" name="Rounded Rectangle 5"/>
+          <p:cNvSpPr/>
+          <p:nvPr/>
+        </p:nvSpPr>
+        <p:spPr>
+          <a:xfrm>
+            <a:off x="8412480" y="5120640"/>
+            <a:ext cx="3017520" cy="822960"/>
+          </a:xfrm>
+          <a:prstGeom prst="roundRect">
+            <a:avLst/>
+          </a:prstGeom>
+          <a:solidFill>
+            <a:srgbClr val="1E293B"/>
+          </a:solidFill>
+          <a:ln w="12700">
+            <a:solidFill>
+              <a:srgbClr val="0E7490"/>
+            </a:solidFill>
+          </a:ln>
+        </p:spPr>
+        <p:style>
+          <a:lnRef idx="1">
+            <a:schemeClr val="accent1"/>
+          </a:lnRef>
+          <a:fillRef idx="3">
+            <a:schemeClr val="accent1"/>
+          </a:fillRef>
+          <a:effectRef idx="2">
+            <a:schemeClr val="accent1"/>
+          </a:effectRef>
+          <a:fontRef idx="minor">
+            <a:schemeClr val="lt1"/>
+          </a:fontRef>
+        </p:style>
+        <p:txBody>
+          <a:bodyPr rtlCol="0" anchor="ctr"/>
+          <a:lstStyle/>
+          <a:p>
+            <a:pPr algn="ctr"/>
+          </a:p>
+        </p:txBody>
+      </p:sp>
+      <p:sp>
+        <p:nvSpPr>
+          <p:cNvPr id="7" name="TextBox 6"/>
+          <p:cNvSpPr txBox="1"/>
+          <p:nvPr/>
+        </p:nvSpPr>
+        <p:spPr>
+          <a:xfrm>
+            <a:off x="8503920" y="5166360"/>
+            <a:ext cx="2834640" cy="731520"/>
+          </a:xfrm>
+          <a:prstGeom prst="rect">
+            <a:avLst/>
+          </a:prstGeom>
+          <a:noFill/>
+        </p:spPr>
+        <p:txBody>
+          <a:bodyPr wrap="none">
+            <a:spAutoFit/>
+          </a:bodyPr>
+          <a:lstStyle/>
           <a:p>
             <a:pPr>
-              <a:defRPr b="1" sz="1300">
-                <a:solidFill>
-                  <a:srgbClr val="E2E8F0"/>
+              <a:defRPr b="1" sz="1050">
+                <a:solidFill>
+                  <a:srgbClr val="D97706"/>
                 </a:solidFill>
               </a:defRPr>
             </a:pPr>
             <a:r>
-              <a:t>Prepared by: Prof. Anju Markose | Assistant Professor, Dept. of CSE | VJCET</a:t>
+              <a:t>KTU B.Tech Curriculum</a:t>
             </a:r>
           </a:p>
           <a:p>
             <a:pPr>
-              <a:defRPr sz="1100">
-                <a:solidFill>
-                  <a:srgbClr val="94A3B8"/>
+              <a:defRPr sz="950">
+                <a:solidFill>
+                  <a:srgbClr val="F8FAFC"/>
                 </a:solidFill>
               </a:defRPr>
             </a:pPr>
             <a:r>
-              <a:t>Viswajyothi College of Engineering and Technology (VJCET), Vazhakulam</a:t>
+              <a:t>Official Classroom Slide Deck</a:t>
             </a:r>
           </a:p>
         </p:txBody>
@@ -3395,14 +3534,14 @@
           <a:lstStyle/>
           <a:p>
             <a:pPr>
-              <a:defRPr b="1" sz="2300">
+              <a:defRPr b="1" sz="2200">
                 <a:solidFill>
                   <a:srgbClr val="F8FAFC"/>
                 </a:solidFill>
               </a:defRPr>
             </a:pPr>
             <a:r>
-              <a:t>4.5.1 Digital-to-Analog Modulation Techniques</a:t>
+              <a:t>4.5.1 Digital Modulation Schemes: ASK vs FSK vs PSK vs QAM</a:t>
             </a:r>
           </a:p>
         </p:txBody>
@@ -3437,7 +3576,7 @@
               </a:defRPr>
             </a:pPr>
             <a:r>
-              <a:t>M4.5 MODULATION METHODS</a:t>
+              <a:t>M4.5 MODULATION SCHEMES</a:t>
             </a:r>
           </a:p>
         </p:txBody>
@@ -3450,18 +3589,18 @@
         </p:nvSpPr>
         <p:spPr>
           <a:xfrm>
-            <a:off x="731520" y="1280160"/>
-            <a:ext cx="5212080" cy="4846320"/>
+            <a:off x="731520" y="1234440"/>
+            <a:ext cx="5212080" cy="4892040"/>
           </a:xfrm>
           <a:prstGeom prst="roundRect">
             <a:avLst/>
           </a:prstGeom>
           <a:solidFill>
-            <a:srgbClr val="F1F5F9"/>
+            <a:srgbClr val="F8FAFC"/>
           </a:solidFill>
           <a:ln w="19050">
             <a:solidFill>
-              <a:srgbClr val="0E7490"/>
+              <a:srgbClr val="0F1E4A"/>
             </a:solidFill>
           </a:ln>
         </p:spPr>
@@ -3495,7 +3634,7 @@
         </p:nvSpPr>
         <p:spPr>
           <a:xfrm>
-            <a:off x="914400" y="1417320"/>
+            <a:off x="914400" y="1371600"/>
             <a:ext cx="4846320" cy="4572000"/>
           </a:xfrm>
           <a:prstGeom prst="rect">
@@ -3511,76 +3650,61 @@
           <a:p>
             <a:pPr>
               <a:spcAft>
-                <a:spcPts val="1200"/>
+                <a:spcPts val="1000"/>
               </a:spcAft>
-              <a:defRPr b="1" sz="1600">
+              <a:defRPr b="1" sz="1550">
                 <a:solidFill>
                   <a:srgbClr val="0F1E4A"/>
                 </a:solidFill>
               </a:defRPr>
             </a:pPr>
             <a:r>
-              <a:t>Basic Shift Keying (ASK, FSK, PSK)</a:t>
+              <a:t>ASK, FSK &amp; PSK</a:t>
             </a:r>
           </a:p>
           <a:p>
             <a:pPr>
               <a:spcAft>
-                <a:spcPts val="600"/>
+                <a:spcPts val="500"/>
               </a:spcAft>
-              <a:defRPr sz="1250">
-                <a:solidFill>
-                  <a:srgbClr val="1E293B"/>
+              <a:defRPr sz="1200">
+                <a:solidFill>
+                  <a:srgbClr val="0F172A"/>
                 </a:solidFill>
               </a:defRPr>
             </a:pPr>
             <a:r>
-              <a:t>• ASK (Amplitude Shift Keying): Varies carrier amplitude: Bit 1 = High amplitude $A_1$; Bit 0 = Low amplitude $A_2$ (or 0 in OOK). Susceptible to noise</a:t>
+              <a:t>• ASK (Amplitude Shift Keying / BASK): Bit 1 = High amplitude carrier $A_1 \cos(2\pi f_c t)$; Bit 0 = Low amplitude $A_2$ (or 0 in OOK). Susceptible to noise</a:t>
             </a:r>
           </a:p>
           <a:p>
             <a:pPr>
               <a:spcAft>
-                <a:spcPts val="600"/>
+                <a:spcPts val="500"/>
               </a:spcAft>
-              <a:defRPr sz="1250">
-                <a:solidFill>
-                  <a:srgbClr val="1E293B"/>
+              <a:defRPr sz="1200">
+                <a:solidFill>
+                  <a:srgbClr val="0F172A"/>
                 </a:solidFill>
               </a:defRPr>
             </a:pPr>
             <a:r>
-              <a:t>• FSK (Frequency Shift Keying): Varies carrier frequency: Bit 1 = Frequency $f_1$; Bit 0 = Frequency $f_2$</a:t>
+              <a:t>• FSK (Frequency Shift Keying / BFSK): Bit 1 = Frequency $f_1$; Bit 0 = Frequency $f_2$. Robust against amplitude noise; requires higher bandwidth</a:t>
             </a:r>
           </a:p>
           <a:p>
             <a:pPr>
               <a:spcAft>
-                <a:spcPts val="600"/>
+                <a:spcPts val="500"/>
               </a:spcAft>
-              <a:defRPr sz="1250">
-                <a:solidFill>
-                  <a:srgbClr val="1E293B"/>
+              <a:defRPr sz="1200">
+                <a:solidFill>
+                  <a:srgbClr val="0F172A"/>
                 </a:solidFill>
               </a:defRPr>
             </a:pPr>
             <a:r>
-              <a:t>• BPSK (Binary Phase Shift Keying): Varies carrier phase: Bit 0 = $0^\circ$ phase; Bit 1 = $180^\circ$ phase. Highly robust against noise</a:t>
-            </a:r>
-          </a:p>
-          <a:p>
-            <a:pPr>
-              <a:spcAft>
-                <a:spcPts val="600"/>
-              </a:spcAft>
-              <a:defRPr sz="1250">
-                <a:solidFill>
-                  <a:srgbClr val="1E293B"/>
-                </a:solidFill>
-              </a:defRPr>
-            </a:pPr>
-            <a:r>
-              <a:t>• QPSK (Quadrature PSK): Uses 4 phase angles ($45^\circ, 135^\circ, 225^\circ, 315^\circ$) to transmit 2 bits per signal baud</a:t>
+              <a:t>• PSK (Phase Shift Keying / BPSK &amp; QPSK): BPSK: Bit 1 = $0^\circ$ phase, Bit 0 = $180^\circ$ phase. QPSK: 2 bits per baud ($00, 01, 10, 11$) using 4 orthogonal phases ($45^\circ, 135^\circ, 225^\circ, 315^\circ$)</a:t>
             </a:r>
           </a:p>
         </p:txBody>
@@ -3593,8 +3717,8 @@
         </p:nvSpPr>
         <p:spPr>
           <a:xfrm>
-            <a:off x="6309360" y="1280160"/>
-            <a:ext cx="5212080" cy="4846320"/>
+            <a:off x="6309360" y="1234440"/>
+            <a:ext cx="5212080" cy="4892040"/>
           </a:xfrm>
           <a:prstGeom prst="roundRect">
             <a:avLst/>
@@ -3604,7 +3728,7 @@
           </a:solidFill>
           <a:ln w="19050">
             <a:solidFill>
-              <a:srgbClr val="0F1E4A"/>
+              <a:srgbClr val="0E7490"/>
             </a:solidFill>
           </a:ln>
         </p:spPr>
@@ -3638,7 +3762,7 @@
         </p:nvSpPr>
         <p:spPr>
           <a:xfrm>
-            <a:off x="6492240" y="1417320"/>
+            <a:off x="6492240" y="1371600"/>
             <a:ext cx="4846320" cy="4572000"/>
           </a:xfrm>
           <a:prstGeom prst="rect">
@@ -3654,9 +3778,9 @@
           <a:p>
             <a:pPr>
               <a:spcAft>
-                <a:spcPts val="1200"/>
+                <a:spcPts val="1000"/>
               </a:spcAft>
-              <a:defRPr b="1" sz="1600">
+              <a:defRPr b="1" sz="1550">
                 <a:solidFill>
                   <a:srgbClr val="0E7490"/>
                 </a:solidFill>
@@ -3669,61 +3793,61 @@
           <a:p>
             <a:pPr>
               <a:spcAft>
-                <a:spcPts val="600"/>
+                <a:spcPts val="500"/>
               </a:spcAft>
-              <a:defRPr sz="1250">
-                <a:solidFill>
-                  <a:srgbClr val="1E293B"/>
+              <a:defRPr sz="1200">
+                <a:solidFill>
+                  <a:srgbClr val="0F172A"/>
                 </a:solidFill>
               </a:defRPr>
             </a:pPr>
             <a:r>
-              <a:t>• Concept: Combines Amplitude Shift Keying and Phase Shift Keying to pack multiple bits per baud</a:t>
+              <a:t>• Concept: Combines Amplitude Modulation (ASK) and Phase Modulation (PSK) simultaneously to maximize spectral efficiency</a:t>
             </a:r>
           </a:p>
           <a:p>
             <a:pPr>
               <a:spcAft>
-                <a:spcPts val="600"/>
+                <a:spcPts val="500"/>
               </a:spcAft>
-              <a:defRPr sz="1250">
-                <a:solidFill>
-                  <a:srgbClr val="1E293B"/>
+              <a:defRPr sz="1200">
+                <a:solidFill>
+                  <a:srgbClr val="0F172A"/>
                 </a:solidFill>
               </a:defRPr>
             </a:pPr>
             <a:r>
-              <a:t>• 16-QAM: 16 constellation points $\implies 4 \text{ bits per baud}$ ($2^4 = 16$)</a:t>
+              <a:t>• 16-QAM &amp; 64-QAM: 16-QAM encodes 4 bits/symbol ($2^4 = 16$ constellation points); 64-QAM encodes 6 bits/symbol; 256-QAM encodes 8 bits/symbol</a:t>
             </a:r>
           </a:p>
           <a:p>
             <a:pPr>
               <a:spcAft>
-                <a:spcPts val="600"/>
+                <a:spcPts val="500"/>
               </a:spcAft>
-              <a:defRPr sz="1250">
-                <a:solidFill>
-                  <a:srgbClr val="1E293B"/>
+              <a:defRPr sz="1200">
+                <a:solidFill>
+                  <a:srgbClr val="0F172A"/>
                 </a:solidFill>
               </a:defRPr>
             </a:pPr>
             <a:r>
-              <a:t>• 64-QAM / 256-QAM: 64 points (6 bits/baud) / 256 points (8 bits/baud); used in modern 4G/5G, Wi-Fi 6, and cable modems</a:t>
+              <a:t>• Constellation Diagrams: Visualizes constellation constellation points in In-Phase ($I$) and Quadrature ($Q$) 2D plane</a:t>
             </a:r>
           </a:p>
           <a:p>
             <a:pPr>
               <a:spcAft>
-                <a:spcPts val="600"/>
+                <a:spcPts val="500"/>
               </a:spcAft>
-              <a:defRPr sz="1250">
-                <a:solidFill>
-                  <a:srgbClr val="1E293B"/>
+              <a:defRPr sz="1200">
+                <a:solidFill>
+                  <a:srgbClr val="0F172A"/>
                 </a:solidFill>
               </a:defRPr>
             </a:pPr>
             <a:r>
-              <a:t>• Bandwidth Efficiency: Achieves massive bit rates over narrow RF channels</a:t>
+              <a:t>• Applications: Wi-Fi (802.11ac/ax), 4G/5G LTE, Cable modems (DOCSIS)</a:t>
             </a:r>
           </a:p>
         </p:txBody>
@@ -3736,8 +3860,8 @@
         </p:nvSpPr>
         <p:spPr>
           <a:xfrm>
-            <a:off x="731520" y="6309360"/>
-            <a:ext cx="10789920" cy="365760"/>
+            <a:off x="731520" y="6327648"/>
+            <a:ext cx="10789920" cy="320040"/>
           </a:xfrm>
           <a:prstGeom prst="rect">
             <a:avLst/>
@@ -3759,6 +3883,41 @@
             </a:pPr>
             <a:r>
               <a:t>PCCST501 Computer Networks | KTU 2024 Scheme | Prof. Anju Markose | Assistant Professor, Dept. of CSE | VJCET</a:t>
+            </a:r>
+          </a:p>
+        </p:txBody>
+      </p:sp>
+      <p:sp>
+        <p:nvSpPr>
+          <p:cNvPr id="11" name="TextBox 10"/>
+          <p:cNvSpPr txBox="1"/>
+          <p:nvPr/>
+        </p:nvSpPr>
+        <p:spPr>
+          <a:xfrm>
+            <a:off x="6858000" y="6327648"/>
+            <a:ext cx="4572000" cy="320040"/>
+          </a:xfrm>
+          <a:prstGeom prst="rect">
+            <a:avLst/>
+          </a:prstGeom>
+          <a:noFill/>
+        </p:spPr>
+        <p:txBody>
+          <a:bodyPr wrap="none">
+            <a:spAutoFit/>
+          </a:bodyPr>
+          <a:lstStyle/>
+          <a:p>
+            <a:pPr algn="r">
+              <a:defRPr sz="950">
+                <a:solidFill>
+                  <a:srgbClr val="64748B"/>
+                </a:solidFill>
+              </a:defRPr>
+            </a:pPr>
+            <a:r>
+              <a:t>Dept. of CSE, VJCET</a:t>
             </a:r>
           </a:p>
         </p:txBody>
@@ -3890,14 +4049,14 @@
           <a:lstStyle/>
           <a:p>
             <a:pPr>
-              <a:defRPr b="1" sz="2300">
+              <a:defRPr b="1" sz="2200">
                 <a:solidFill>
                   <a:srgbClr val="F8FAFC"/>
                 </a:solidFill>
               </a:defRPr>
             </a:pPr>
             <a:r>
-              <a:t>4.5.2 Multiplexing: FDM, WDM &amp; Time Division Multiplexing</a:t>
+              <a:t>4.5.2 Multiplexing: FDM vs WDM vs Synchronous TDM vs Statistical TDM</a:t>
             </a:r>
           </a:p>
         </p:txBody>
@@ -3932,204 +4091,31 @@
               </a:defRPr>
             </a:pPr>
             <a:r>
-              <a:t>M4.5 MULTIPLEXING</a:t>
-            </a:r>
-          </a:p>
-        </p:txBody>
-      </p:sp>
-      <p:sp>
-        <p:nvSpPr>
-          <p:cNvPr id="6" name="TextBox 5"/>
-          <p:cNvSpPr txBox="1"/>
-          <p:nvPr/>
-        </p:nvSpPr>
-        <p:spPr>
-          <a:xfrm>
-            <a:off x="731520" y="1280160"/>
-            <a:ext cx="6858000" cy="4937760"/>
-          </a:xfrm>
-          <a:prstGeom prst="rect">
-            <a:avLst/>
-          </a:prstGeom>
-          <a:noFill/>
-        </p:spPr>
-        <p:txBody>
-          <a:bodyPr wrap="square">
-            <a:spAutoFit/>
-          </a:bodyPr>
-          <a:lstStyle/>
-          <a:p>
-            <a:pPr>
-              <a:spcAft>
-                <a:spcPts val="200"/>
-              </a:spcAft>
-              <a:defRPr b="1" sz="1500">
-                <a:solidFill>
-                  <a:srgbClr val="0F1E4A"/>
-                </a:solidFill>
-              </a:defRPr>
-            </a:pPr>
-            <a:r>
-              <a:t>• Bandwidth Utilization Goal</a:t>
-            </a:r>
-          </a:p>
-          <a:p>
-            <a:pPr>
-              <a:spcAft>
-                <a:spcPts val="800"/>
-              </a:spcAft>
-              <a:defRPr sz="1300">
-                <a:solidFill>
-                  <a:srgbClr val="1E293B"/>
-                </a:solidFill>
-              </a:defRPr>
-            </a:pPr>
-            <a:r>
-              <a:t>   Combine multiple low-speed incoming data channels over a single high-capacity physical link.</a:t>
-            </a:r>
-          </a:p>
-          <a:p>
-            <a:pPr>
-              <a:spcAft>
-                <a:spcPts val="200"/>
-              </a:spcAft>
-              <a:defRPr b="1" sz="1500">
-                <a:solidFill>
-                  <a:srgbClr val="0F1E4A"/>
-                </a:solidFill>
-              </a:defRPr>
-            </a:pPr>
-            <a:r>
-              <a:t>• Frequency Division Multiplexing (FDM)</a:t>
-            </a:r>
-          </a:p>
-          <a:p>
-            <a:pPr>
-              <a:spcAft>
-                <a:spcPts val="800"/>
-              </a:spcAft>
-              <a:defRPr sz="1300">
-                <a:solidFill>
-                  <a:srgbClr val="1E293B"/>
-                </a:solidFill>
-              </a:defRPr>
-            </a:pPr>
-            <a:r>
-              <a:t>   Analog technique. Divides total link bandwidth into separate non-overlapping frequency carrier bands separated by Guard Bands (Used in Radio, Cable TV, ADSL).</a:t>
-            </a:r>
-          </a:p>
-          <a:p>
-            <a:pPr>
-              <a:spcAft>
-                <a:spcPts val="200"/>
-              </a:spcAft>
-              <a:defRPr b="1" sz="1500">
-                <a:solidFill>
-                  <a:srgbClr val="0F1E4A"/>
-                </a:solidFill>
-              </a:defRPr>
-            </a:pPr>
-            <a:r>
-              <a:t>• Wavelength Division Multiplexing (WDM / DWDM)</a:t>
-            </a:r>
-          </a:p>
-          <a:p>
-            <a:pPr>
-              <a:spcAft>
-                <a:spcPts val="800"/>
-              </a:spcAft>
-              <a:defRPr sz="1300">
-                <a:solidFill>
-                  <a:srgbClr val="1E293B"/>
-                </a:solidFill>
-              </a:defRPr>
-            </a:pPr>
-            <a:r>
-              <a:t>   Optical multiplexing over fiber. Multiplexes multiple laser beams of different light wavelengths (colors) into a single fiber strand (Dense WDM carries $&gt; 80$ channels of 100 Gbps each).</a:t>
-            </a:r>
-          </a:p>
-          <a:p>
-            <a:pPr>
-              <a:spcAft>
-                <a:spcPts val="200"/>
-              </a:spcAft>
-              <a:defRPr b="1" sz="1500">
-                <a:solidFill>
-                  <a:srgbClr val="0F1E4A"/>
-                </a:solidFill>
-              </a:defRPr>
-            </a:pPr>
-            <a:r>
-              <a:t>• Synchronous Time Division Multiplexing (TDM)</a:t>
-            </a:r>
-          </a:p>
-          <a:p>
-            <a:pPr>
-              <a:spcAft>
-                <a:spcPts val="800"/>
-              </a:spcAft>
-              <a:defRPr sz="1300">
-                <a:solidFill>
-                  <a:srgbClr val="1E293B"/>
-                </a:solidFill>
-              </a:defRPr>
-            </a:pPr>
-            <a:r>
-              <a:t>   Digital technique. Time divided into recurring frames; each frame contains fixed time slots pre-assigned to each input channel. Flaw: Wastes bandwidth if a channel has no data to send (idle slots).</a:t>
-            </a:r>
-          </a:p>
-          <a:p>
-            <a:pPr>
-              <a:spcAft>
-                <a:spcPts val="200"/>
-              </a:spcAft>
-              <a:defRPr b="1" sz="1500">
-                <a:solidFill>
-                  <a:srgbClr val="0F1E4A"/>
-                </a:solidFill>
-              </a:defRPr>
-            </a:pPr>
-            <a:r>
-              <a:t>• Statistical TDM (Asynchronous TDM)</a:t>
-            </a:r>
-          </a:p>
-          <a:p>
-            <a:pPr>
-              <a:spcAft>
-                <a:spcPts val="800"/>
-              </a:spcAft>
-              <a:defRPr sz="1300">
-                <a:solidFill>
-                  <a:srgbClr val="1E293B"/>
-                </a:solidFill>
-              </a:defRPr>
-            </a:pPr>
-            <a:r>
-              <a:t>   Time slots allocated dynamically on-demand only to active input channels carrying data. Eliminates wasted idle slots, dramatically increasing link utilization.</a:t>
-            </a:r>
-          </a:p>
-        </p:txBody>
-      </p:sp>
-      <p:sp>
-        <p:nvSpPr>
-          <p:cNvPr id="7" name="Rounded Rectangle 6"/>
+              <a:t>M4.5 MULTIPLEXING TAXONOMY</a:t>
+            </a:r>
+          </a:p>
+        </p:txBody>
+      </p:sp>
+      <p:sp>
+        <p:nvSpPr>
+          <p:cNvPr id="6" name="Rounded Rectangle 5"/>
           <p:cNvSpPr/>
           <p:nvPr/>
         </p:nvSpPr>
         <p:spPr>
           <a:xfrm>
-            <a:off x="7955279" y="1280160"/>
-            <a:ext cx="3566160" cy="4846320"/>
+            <a:off x="731520" y="1234440"/>
+            <a:ext cx="5212080" cy="4892040"/>
           </a:xfrm>
           <a:prstGeom prst="roundRect">
             <a:avLst/>
           </a:prstGeom>
           <a:solidFill>
-            <a:srgbClr val="F1F5F9"/>
+            <a:srgbClr val="F8FAFC"/>
           </a:solidFill>
           <a:ln w="19050">
             <a:solidFill>
-              <a:srgbClr val="0E7490"/>
+              <a:srgbClr val="0F1E4A"/>
             </a:solidFill>
           </a:ln>
         </p:spPr>
@@ -4157,14 +4143,14 @@
       </p:sp>
       <p:sp>
         <p:nvSpPr>
-          <p:cNvPr id="8" name="TextBox 7"/>
+          <p:cNvPr id="7" name="TextBox 6"/>
           <p:cNvSpPr txBox="1"/>
           <p:nvPr/>
         </p:nvSpPr>
         <p:spPr>
           <a:xfrm>
-            <a:off x="8138160" y="1417320"/>
-            <a:ext cx="3200400" cy="4572000"/>
+            <a:off x="914400" y="1371600"/>
+            <a:ext cx="4846320" cy="4572000"/>
           </a:xfrm>
           <a:prstGeom prst="rect">
             <a:avLst/>
@@ -4181,14 +4167,612 @@
               <a:spcAft>
                 <a:spcPts val="1000"/>
               </a:spcAft>
-              <a:defRPr b="1" sz="1500">
+              <a:defRPr b="1" sz="1550">
+                <a:solidFill>
+                  <a:srgbClr val="0F1E4A"/>
+                </a:solidFill>
+              </a:defRPr>
+            </a:pPr>
+            <a:r>
+              <a:t>Frequency &amp; Optical Multiplexing</a:t>
+            </a:r>
+          </a:p>
+          <a:p>
+            <a:pPr>
+              <a:spcAft>
+                <a:spcPts val="500"/>
+              </a:spcAft>
+              <a:defRPr sz="1200">
+                <a:solidFill>
+                  <a:srgbClr val="0F172A"/>
+                </a:solidFill>
+              </a:defRPr>
+            </a:pPr>
+            <a:r>
+              <a:t>• FDM (Frequency-Division Multiplexing): Divides total analog bandwidth into distinct frequency channels separated by **Guard Bands** (e.g., FM radio, cable TV)</a:t>
+            </a:r>
+          </a:p>
+          <a:p>
+            <a:pPr>
+              <a:spcAft>
+                <a:spcPts val="500"/>
+              </a:spcAft>
+              <a:defRPr sz="1200">
+                <a:solidFill>
+                  <a:srgbClr val="0F172A"/>
+                </a:solidFill>
+              </a:defRPr>
+            </a:pPr>
+            <a:r>
+              <a:t>• WDM (Wavelength-Division Multiplexing): Optical analog of FDM. Combines multiple laser light beams of different wavelengths (e.g., 1550 nm, 1310 nm) onto a single optical fiber using diffraction prisms. DWDM handles 80+ channels</a:t>
+            </a:r>
+          </a:p>
+        </p:txBody>
+      </p:sp>
+      <p:sp>
+        <p:nvSpPr>
+          <p:cNvPr id="8" name="Rounded Rectangle 7"/>
+          <p:cNvSpPr/>
+          <p:nvPr/>
+        </p:nvSpPr>
+        <p:spPr>
+          <a:xfrm>
+            <a:off x="6309360" y="1234440"/>
+            <a:ext cx="5212080" cy="4892040"/>
+          </a:xfrm>
+          <a:prstGeom prst="roundRect">
+            <a:avLst/>
+          </a:prstGeom>
+          <a:solidFill>
+            <a:srgbClr val="EEF2FF"/>
+          </a:solidFill>
+          <a:ln w="19050">
+            <a:solidFill>
+              <a:srgbClr val="0E7490"/>
+            </a:solidFill>
+          </a:ln>
+        </p:spPr>
+        <p:style>
+          <a:lnRef idx="1">
+            <a:schemeClr val="accent1"/>
+          </a:lnRef>
+          <a:fillRef idx="3">
+            <a:schemeClr val="accent1"/>
+          </a:fillRef>
+          <a:effectRef idx="2">
+            <a:schemeClr val="accent1"/>
+          </a:effectRef>
+          <a:fontRef idx="minor">
+            <a:schemeClr val="lt1"/>
+          </a:fontRef>
+        </p:style>
+        <p:txBody>
+          <a:bodyPr rtlCol="0" anchor="ctr"/>
+          <a:lstStyle/>
+          <a:p>
+            <a:pPr algn="ctr"/>
+          </a:p>
+        </p:txBody>
+      </p:sp>
+      <p:sp>
+        <p:nvSpPr>
+          <p:cNvPr id="9" name="TextBox 8"/>
+          <p:cNvSpPr txBox="1"/>
+          <p:nvPr/>
+        </p:nvSpPr>
+        <p:spPr>
+          <a:xfrm>
+            <a:off x="6492240" y="1371600"/>
+            <a:ext cx="4846320" cy="4572000"/>
+          </a:xfrm>
+          <a:prstGeom prst="rect">
+            <a:avLst/>
+          </a:prstGeom>
+          <a:noFill/>
+        </p:spPr>
+        <p:txBody>
+          <a:bodyPr wrap="square">
+            <a:spAutoFit/>
+          </a:bodyPr>
+          <a:lstStyle/>
+          <a:p>
+            <a:pPr>
+              <a:spcAft>
+                <a:spcPts val="1000"/>
+              </a:spcAft>
+              <a:defRPr b="1" sz="1550">
                 <a:solidFill>
                   <a:srgbClr val="0E7490"/>
                 </a:solidFill>
               </a:defRPr>
             </a:pPr>
             <a:r>
-              <a:t>Multiplexing Summary</a:t>
+              <a:t>Time-Division Multiplexing (TDM)</a:t>
+            </a:r>
+          </a:p>
+          <a:p>
+            <a:pPr>
+              <a:spcAft>
+                <a:spcPts val="500"/>
+              </a:spcAft>
+              <a:defRPr sz="1200">
+                <a:solidFill>
+                  <a:srgbClr val="0F172A"/>
+                </a:solidFill>
+              </a:defRPr>
+            </a:pPr>
+            <a:r>
+              <a:t>• Synchronous TDM: Time divided into fixed recurring frames containing dedicated slots allocated round-robin to each input line. Slot wasted if an input line is idle</a:t>
+            </a:r>
+          </a:p>
+          <a:p>
+            <a:pPr>
+              <a:spcAft>
+                <a:spcPts val="500"/>
+              </a:spcAft>
+              <a:defRPr sz="1200">
+                <a:solidFill>
+                  <a:srgbClr val="0F172A"/>
+                </a:solidFill>
+              </a:defRPr>
+            </a:pPr>
+            <a:r>
+              <a:t>• Statistical TDM (Asynchronous): Dynamically allocates time slots **on demand** only to active lines transmitting data. Eliminates idle slot waste by adding channel address headers to each slot</a:t>
+            </a:r>
+          </a:p>
+        </p:txBody>
+      </p:sp>
+      <p:sp>
+        <p:nvSpPr>
+          <p:cNvPr id="10" name="TextBox 9"/>
+          <p:cNvSpPr txBox="1"/>
+          <p:nvPr/>
+        </p:nvSpPr>
+        <p:spPr>
+          <a:xfrm>
+            <a:off x="731520" y="6327648"/>
+            <a:ext cx="10789920" cy="320040"/>
+          </a:xfrm>
+          <a:prstGeom prst="rect">
+            <a:avLst/>
+          </a:prstGeom>
+          <a:noFill/>
+        </p:spPr>
+        <p:txBody>
+          <a:bodyPr wrap="none">
+            <a:spAutoFit/>
+          </a:bodyPr>
+          <a:lstStyle/>
+          <a:p>
+            <a:pPr>
+              <a:defRPr sz="950">
+                <a:solidFill>
+                  <a:srgbClr val="64748B"/>
+                </a:solidFill>
+              </a:defRPr>
+            </a:pPr>
+            <a:r>
+              <a:t>PCCST501 Computer Networks | KTU 2024 Scheme | Prof. Anju Markose | Assistant Professor, Dept. of CSE | VJCET</a:t>
+            </a:r>
+          </a:p>
+        </p:txBody>
+      </p:sp>
+      <p:sp>
+        <p:nvSpPr>
+          <p:cNvPr id="11" name="TextBox 10"/>
+          <p:cNvSpPr txBox="1"/>
+          <p:nvPr/>
+        </p:nvSpPr>
+        <p:spPr>
+          <a:xfrm>
+            <a:off x="6858000" y="6327648"/>
+            <a:ext cx="4572000" cy="320040"/>
+          </a:xfrm>
+          <a:prstGeom prst="rect">
+            <a:avLst/>
+          </a:prstGeom>
+          <a:noFill/>
+        </p:spPr>
+        <p:txBody>
+          <a:bodyPr wrap="none">
+            <a:spAutoFit/>
+          </a:bodyPr>
+          <a:lstStyle/>
+          <a:p>
+            <a:pPr algn="r">
+              <a:defRPr sz="950">
+                <a:solidFill>
+                  <a:srgbClr val="64748B"/>
+                </a:solidFill>
+              </a:defRPr>
+            </a:pPr>
+            <a:r>
+              <a:t>Dept. of CSE, VJCET</a:t>
+            </a:r>
+          </a:p>
+        </p:txBody>
+      </p:sp>
+    </p:spTree>
+  </p:cSld>
+  <p:clrMapOvr>
+    <a:masterClrMapping/>
+  </p:clrMapOvr>
+</p:sld>
+</file>
+
+<file path=ppt/slides/slide4.xml><?xml version="1.0" encoding="utf-8"?>
+<p:sld xmlns:a="http://schemas.openxmlformats.org/drawingml/2006/main" xmlns:p="http://schemas.openxmlformats.org/presentationml/2006/main" xmlns:r="http://schemas.openxmlformats.org/officeDocument/2006/relationships">
+  <p:cSld>
+    <p:spTree>
+      <p:nvGrpSpPr>
+        <p:cNvPr id="1" name=""/>
+        <p:cNvGrpSpPr/>
+        <p:nvPr/>
+      </p:nvGrpSpPr>
+      <p:grpSpPr/>
+      <p:sp>
+        <p:nvSpPr>
+          <p:cNvPr id="2" name="Rectangle 1"/>
+          <p:cNvSpPr/>
+          <p:nvPr/>
+        </p:nvSpPr>
+        <p:spPr>
+          <a:xfrm>
+            <a:off x="0" y="0"/>
+            <a:ext cx="12191695" cy="1005840"/>
+          </a:xfrm>
+          <a:prstGeom prst="rect">
+            <a:avLst/>
+          </a:prstGeom>
+          <a:solidFill>
+            <a:srgbClr val="0F1E4A"/>
+          </a:solidFill>
+          <a:ln>
+            <a:noFill/>
+          </a:ln>
+        </p:spPr>
+        <p:style>
+          <a:lnRef idx="1">
+            <a:schemeClr val="accent1"/>
+          </a:lnRef>
+          <a:fillRef idx="3">
+            <a:schemeClr val="accent1"/>
+          </a:fillRef>
+          <a:effectRef idx="2">
+            <a:schemeClr val="accent1"/>
+          </a:effectRef>
+          <a:fontRef idx="minor">
+            <a:schemeClr val="lt1"/>
+          </a:fontRef>
+        </p:style>
+        <p:txBody>
+          <a:bodyPr rtlCol="0" anchor="ctr"/>
+          <a:lstStyle/>
+          <a:p>
+            <a:pPr algn="ctr"/>
+          </a:p>
+        </p:txBody>
+      </p:sp>
+      <p:sp>
+        <p:nvSpPr>
+          <p:cNvPr id="3" name="Rectangle 2"/>
+          <p:cNvSpPr/>
+          <p:nvPr/>
+        </p:nvSpPr>
+        <p:spPr>
+          <a:xfrm>
+            <a:off x="0" y="969264"/>
+            <a:ext cx="12191695" cy="36576"/>
+          </a:xfrm>
+          <a:prstGeom prst="rect">
+            <a:avLst/>
+          </a:prstGeom>
+          <a:solidFill>
+            <a:srgbClr val="D97706"/>
+          </a:solidFill>
+          <a:ln>
+            <a:noFill/>
+          </a:ln>
+        </p:spPr>
+        <p:style>
+          <a:lnRef idx="1">
+            <a:schemeClr val="accent1"/>
+          </a:lnRef>
+          <a:fillRef idx="3">
+            <a:schemeClr val="accent1"/>
+          </a:fillRef>
+          <a:effectRef idx="2">
+            <a:schemeClr val="accent1"/>
+          </a:effectRef>
+          <a:fontRef idx="minor">
+            <a:schemeClr val="lt1"/>
+          </a:fontRef>
+        </p:style>
+        <p:txBody>
+          <a:bodyPr rtlCol="0" anchor="ctr"/>
+          <a:lstStyle/>
+          <a:p>
+            <a:pPr algn="ctr"/>
+          </a:p>
+        </p:txBody>
+      </p:sp>
+      <p:sp>
+        <p:nvSpPr>
+          <p:cNvPr id="4" name="TextBox 3"/>
+          <p:cNvSpPr txBox="1"/>
+          <p:nvPr/>
+        </p:nvSpPr>
+        <p:spPr>
+          <a:xfrm>
+            <a:off x="731520" y="164592"/>
+            <a:ext cx="8412480" cy="685800"/>
+          </a:xfrm>
+          <a:prstGeom prst="rect">
+            <a:avLst/>
+          </a:prstGeom>
+          <a:noFill/>
+        </p:spPr>
+        <p:txBody>
+          <a:bodyPr wrap="none">
+            <a:spAutoFit/>
+          </a:bodyPr>
+          <a:lstStyle/>
+          <a:p>
+            <a:pPr>
+              <a:defRPr b="1" sz="2100">
+                <a:solidFill>
+                  <a:srgbClr val="F8FAFC"/>
+                </a:solidFill>
+              </a:defRPr>
+            </a:pPr>
+            <a:r>
+              <a:t>🎯 Exam Booster &amp; Review: Analog Transmission &amp; Multiplexing</a:t>
+            </a:r>
+          </a:p>
+        </p:txBody>
+      </p:sp>
+      <p:sp>
+        <p:nvSpPr>
+          <p:cNvPr id="5" name="TextBox 4"/>
+          <p:cNvSpPr txBox="1"/>
+          <p:nvPr/>
+        </p:nvSpPr>
+        <p:spPr>
+          <a:xfrm>
+            <a:off x="8229600" y="164592"/>
+            <a:ext cx="3291840" cy="685800"/>
+          </a:xfrm>
+          <a:prstGeom prst="rect">
+            <a:avLst/>
+          </a:prstGeom>
+          <a:noFill/>
+        </p:spPr>
+        <p:txBody>
+          <a:bodyPr wrap="none">
+            <a:spAutoFit/>
+          </a:bodyPr>
+          <a:lstStyle/>
+          <a:p>
+            <a:pPr algn="r">
+              <a:defRPr b="1" sz="1300">
+                <a:solidFill>
+                  <a:srgbClr val="D97706"/>
+                </a:solidFill>
+              </a:defRPr>
+            </a:pPr>
+            <a:r>
+              <a:t>M4.5</a:t>
+            </a:r>
+          </a:p>
+        </p:txBody>
+      </p:sp>
+      <p:sp>
+        <p:nvSpPr>
+          <p:cNvPr id="6" name="Rounded Rectangle 5"/>
+          <p:cNvSpPr/>
+          <p:nvPr/>
+        </p:nvSpPr>
+        <p:spPr>
+          <a:xfrm>
+            <a:off x="731520" y="1234440"/>
+            <a:ext cx="5303520" cy="4892040"/>
+          </a:xfrm>
+          <a:prstGeom prst="roundRect">
+            <a:avLst/>
+          </a:prstGeom>
+          <a:solidFill>
+            <a:srgbClr val="FEF3C7"/>
+          </a:solidFill>
+          <a:ln w="19050">
+            <a:solidFill>
+              <a:srgbClr val="D97706"/>
+            </a:solidFill>
+          </a:ln>
+        </p:spPr>
+        <p:style>
+          <a:lnRef idx="1">
+            <a:schemeClr val="accent1"/>
+          </a:lnRef>
+          <a:fillRef idx="3">
+            <a:schemeClr val="accent1"/>
+          </a:fillRef>
+          <a:effectRef idx="2">
+            <a:schemeClr val="accent1"/>
+          </a:effectRef>
+          <a:fontRef idx="minor">
+            <a:schemeClr val="lt1"/>
+          </a:fontRef>
+        </p:style>
+        <p:txBody>
+          <a:bodyPr rtlCol="0" anchor="ctr"/>
+          <a:lstStyle/>
+          <a:p>
+            <a:pPr algn="ctr"/>
+          </a:p>
+        </p:txBody>
+      </p:sp>
+      <p:sp>
+        <p:nvSpPr>
+          <p:cNvPr id="7" name="TextBox 6"/>
+          <p:cNvSpPr txBox="1"/>
+          <p:nvPr/>
+        </p:nvSpPr>
+        <p:spPr>
+          <a:xfrm>
+            <a:off x="914400" y="1371600"/>
+            <a:ext cx="4937760" cy="4572000"/>
+          </a:xfrm>
+          <a:prstGeom prst="rect">
+            <a:avLst/>
+          </a:prstGeom>
+          <a:noFill/>
+        </p:spPr>
+        <p:txBody>
+          <a:bodyPr wrap="square">
+            <a:spAutoFit/>
+          </a:bodyPr>
+          <a:lstStyle/>
+          <a:p>
+            <a:pPr>
+              <a:spcAft>
+                <a:spcPts val="1000"/>
+              </a:spcAft>
+              <a:defRPr b="1" sz="1450">
+                <a:solidFill>
+                  <a:srgbClr val="D97706"/>
+                </a:solidFill>
+              </a:defRPr>
+            </a:pPr>
+            <a:r>
+              <a:t>📚 KTU High-Yield Questions (K3 Apply)</a:t>
+            </a:r>
+          </a:p>
+          <a:p>
+            <a:pPr>
+              <a:spcAft>
+                <a:spcPts val="700"/>
+              </a:spcAft>
+              <a:defRPr sz="1200">
+                <a:solidFill>
+                  <a:srgbClr val="0F172A"/>
+                </a:solidFill>
+              </a:defRPr>
+            </a:pPr>
+            <a:r>
+              <a:t>Q: Explain Quadrature Amplitude Modulation (QAM) and draw the constellation diagrams for 4-QAM and 16-QAM. (8 Marks)</a:t>
+            </a:r>
+          </a:p>
+          <a:p>
+            <a:pPr>
+              <a:spcAft>
+                <a:spcPts val="700"/>
+              </a:spcAft>
+              <a:defRPr sz="1200">
+                <a:solidFill>
+                  <a:srgbClr val="0F172A"/>
+                </a:solidFill>
+              </a:defRPr>
+            </a:pPr>
+            <a:r>
+              <a:t>Q: Compare Synchronous TDM and Statistical TDM with framing and slot allocation diagrams. (7 Marks)</a:t>
+            </a:r>
+          </a:p>
+          <a:p>
+            <a:pPr>
+              <a:spcAft>
+                <a:spcPts val="700"/>
+              </a:spcAft>
+              <a:defRPr sz="1200">
+                <a:solidFill>
+                  <a:srgbClr val="0F172A"/>
+                </a:solidFill>
+              </a:defRPr>
+            </a:pPr>
+            <a:r>
+              <a:t>Q: Explain Spread Spectrum techniques: Frequency Hopping Spread Spectrum (FHSS) vs Direct Sequence Spread Spectrum (DSSS). (7 Marks)</a:t>
+            </a:r>
+          </a:p>
+        </p:txBody>
+      </p:sp>
+      <p:sp>
+        <p:nvSpPr>
+          <p:cNvPr id="8" name="Rounded Rectangle 7"/>
+          <p:cNvSpPr/>
+          <p:nvPr/>
+        </p:nvSpPr>
+        <p:spPr>
+          <a:xfrm>
+            <a:off x="6309360" y="1234440"/>
+            <a:ext cx="5212080" cy="4892040"/>
+          </a:xfrm>
+          <a:prstGeom prst="roundRect">
+            <a:avLst/>
+          </a:prstGeom>
+          <a:solidFill>
+            <a:srgbClr val="EEF2FF"/>
+          </a:solidFill>
+          <a:ln w="19050">
+            <a:solidFill>
+              <a:srgbClr val="0E7490"/>
+            </a:solidFill>
+          </a:ln>
+        </p:spPr>
+        <p:style>
+          <a:lnRef idx="1">
+            <a:schemeClr val="accent1"/>
+          </a:lnRef>
+          <a:fillRef idx="3">
+            <a:schemeClr val="accent1"/>
+          </a:fillRef>
+          <a:effectRef idx="2">
+            <a:schemeClr val="accent1"/>
+          </a:effectRef>
+          <a:fontRef idx="minor">
+            <a:schemeClr val="lt1"/>
+          </a:fontRef>
+        </p:style>
+        <p:txBody>
+          <a:bodyPr rtlCol="0" anchor="ctr"/>
+          <a:lstStyle/>
+          <a:p>
+            <a:pPr algn="ctr"/>
+          </a:p>
+        </p:txBody>
+      </p:sp>
+      <p:sp>
+        <p:nvSpPr>
+          <p:cNvPr id="9" name="TextBox 8"/>
+          <p:cNvSpPr txBox="1"/>
+          <p:nvPr/>
+        </p:nvSpPr>
+        <p:spPr>
+          <a:xfrm>
+            <a:off x="6492240" y="1371600"/>
+            <a:ext cx="4846320" cy="4572000"/>
+          </a:xfrm>
+          <a:prstGeom prst="rect">
+            <a:avLst/>
+          </a:prstGeom>
+          <a:noFill/>
+        </p:spPr>
+        <p:txBody>
+          <a:bodyPr wrap="square">
+            <a:spAutoFit/>
+          </a:bodyPr>
+          <a:lstStyle/>
+          <a:p>
+            <a:pPr>
+              <a:spcAft>
+                <a:spcPts val="1000"/>
+              </a:spcAft>
+              <a:defRPr b="1" sz="1450">
+                <a:solidFill>
+                  <a:srgbClr val="0E7490"/>
+                </a:solidFill>
+              </a:defRPr>
+            </a:pPr>
+            <a:r>
+              <a:t>💡 Critical Conceptual Takeaways</a:t>
             </a:r>
           </a:p>
           <a:p>
@@ -4198,12 +4782,12 @@
               </a:spcAft>
               <a:defRPr sz="1200">
                 <a:solidFill>
-                  <a:srgbClr val="1E293B"/>
+                  <a:srgbClr val="0F172A"/>
                 </a:solidFill>
               </a:defRPr>
             </a:pPr>
             <a:r>
-              <a:t>→ FDM: Analog frequency bands</a:t>
+              <a:t>✔ QAM modulates both amplitude and phase to pack multiple bits into a single baud symbol.</a:t>
             </a:r>
           </a:p>
           <a:p>
@@ -4213,12 +4797,12 @@
               </a:spcAft>
               <a:defRPr sz="1200">
                 <a:solidFill>
-                  <a:srgbClr val="1E293B"/>
+                  <a:srgbClr val="0F172A"/>
                 </a:solidFill>
               </a:defRPr>
             </a:pPr>
             <a:r>
-              <a:t>→ WDM: Optical wavelengths in fiber</a:t>
+              <a:t>✔ FDM shares bandwidth in frequency; TDM shares bandwidth in time slots.</a:t>
             </a:r>
           </a:p>
           <a:p>
@@ -4228,56 +4812,26 @@
               </a:spcAft>
               <a:defRPr sz="1200">
                 <a:solidFill>
-                  <a:srgbClr val="1E293B"/>
+                  <a:srgbClr val="0F172A"/>
                 </a:solidFill>
               </a:defRPr>
             </a:pPr>
             <a:r>
-              <a:t>→ Sync TDM: Fixed pre-assigned slots</a:t>
-            </a:r>
-          </a:p>
-          <a:p>
-            <a:pPr>
-              <a:spcAft>
-                <a:spcPts val="600"/>
-              </a:spcAft>
-              <a:defRPr sz="1200">
-                <a:solidFill>
-                  <a:srgbClr val="1E293B"/>
-                </a:solidFill>
-              </a:defRPr>
-            </a:pPr>
-            <a:r>
-              <a:t>→ Stat TDM: Dynamic on-demand slots</a:t>
-            </a:r>
-          </a:p>
-          <a:p>
-            <a:pPr>
-              <a:spcAft>
-                <a:spcPts val="600"/>
-              </a:spcAft>
-              <a:defRPr sz="1200">
-                <a:solidFill>
-                  <a:srgbClr val="1E293B"/>
-                </a:solidFill>
-              </a:defRPr>
-            </a:pPr>
-            <a:r>
-              <a:t>→ Guard Bands: Prevent interference</a:t>
-            </a:r>
-          </a:p>
-        </p:txBody>
-      </p:sp>
-      <p:sp>
-        <p:nvSpPr>
-          <p:cNvPr id="9" name="TextBox 8"/>
+              <a:t>✔ Statistical TDM dynamically allocates slots on demand, achieving much higher link utilization than Synchronous TDM.</a:t>
+            </a:r>
+          </a:p>
+        </p:txBody>
+      </p:sp>
+      <p:sp>
+        <p:nvSpPr>
+          <p:cNvPr id="10" name="TextBox 9"/>
           <p:cNvSpPr txBox="1"/>
           <p:nvPr/>
         </p:nvSpPr>
         <p:spPr>
           <a:xfrm>
-            <a:off x="731520" y="6309360"/>
-            <a:ext cx="10789920" cy="365760"/>
+            <a:off x="731520" y="6327648"/>
+            <a:ext cx="10789920" cy="320040"/>
           </a:xfrm>
           <a:prstGeom prst="rect">
             <a:avLst/>
@@ -4299,6 +4853,41 @@
             </a:pPr>
             <a:r>
               <a:t>PCCST501 Computer Networks | KTU 2024 Scheme | Prof. Anju Markose | Assistant Professor, Dept. of CSE | VJCET</a:t>
+            </a:r>
+          </a:p>
+        </p:txBody>
+      </p:sp>
+      <p:sp>
+        <p:nvSpPr>
+          <p:cNvPr id="11" name="TextBox 10"/>
+          <p:cNvSpPr txBox="1"/>
+          <p:nvPr/>
+        </p:nvSpPr>
+        <p:spPr>
+          <a:xfrm>
+            <a:off x="6858000" y="6327648"/>
+            <a:ext cx="4572000" cy="320040"/>
+          </a:xfrm>
+          <a:prstGeom prst="rect">
+            <a:avLst/>
+          </a:prstGeom>
+          <a:noFill/>
+        </p:spPr>
+        <p:txBody>
+          <a:bodyPr wrap="none">
+            <a:spAutoFit/>
+          </a:bodyPr>
+          <a:lstStyle/>
+          <a:p>
+            <a:pPr algn="r">
+              <a:defRPr sz="950">
+                <a:solidFill>
+                  <a:srgbClr val="64748B"/>
+                </a:solidFill>
+              </a:defRPr>
+            </a:pPr>
+            <a:r>
+              <a:t>Dept. of CSE, VJCET</a:t>
             </a:r>
           </a:p>
         </p:txBody>
